--- a/data/presupuesto/Conciliacion_ETC88_Presentacion.pptx
+++ b/data/presupuesto/Conciliacion_ETC88_Presentacion.pptx
@@ -3759,7 +3759,7 @@
                   <a:srgbClr val="888888"/>
                 </a:solidFill>
               </a:rPr>
-              <a:t>Cifras en RD$ · 36 verificaciones numéricas recalculadas (36 PASS) · acompaña al Excel Conciliacion_Final_ETC88.xlsx</a:t>
+              <a:t>Cifras en RD$ · 37 verificaciones numéricas recalculadas (37 PASS) · acompaña al Excel Conciliacion_Final_ETC88.xlsx</a:t>
             </a:r>
           </a:p>
         </p:txBody>
@@ -3888,7 +3888,7 @@
                   <a:srgbClr val="888888"/>
                 </a:solidFill>
               </a:rPr>
-              <a:t>0 abiertos · 1 notas · el detalle completo está en la hoja 5 del Excel</a:t>
+              <a:t>0 abiertos · 2 notas · el detalle completo está en la hoja 5 del Excel</a:t>
             </a:r>
           </a:p>
         </p:txBody>
@@ -3937,7 +3937,7 @@
         </p:nvGraphicFramePr>
         <p:xfrm>
           <a:off x="457200" y="1554480"/>
-          <a:ext cx="11247120" cy="914400"/>
+          <a:ext cx="11247120" cy="1371600"/>
         </p:xfrm>
         <a:graphic>
           <a:graphicData uri="http://schemas.openxmlformats.org/drawingml/2006/table">
@@ -4076,6 +4076,71 @@
                   <a:tcPr marL="64008" marR="64008" marT="27432" marB="27432">
                     <a:solidFill>
                       <a:srgbClr val="FFFFFF"/>
+                    </a:solidFill>
+                  </a:tcPr>
+                </a:tc>
+              </a:tr>
+              <a:tr h="457200">
+                <a:tc>
+                  <a:txBody>
+                    <a:bodyPr wrap="square"/>
+                    <a:lstStyle/>
+                    <a:p>
+                      <a:r>
+                        <a:rPr sz="1100">
+                          <a:solidFill>
+                            <a:srgbClr val="1E293B"/>
+                          </a:solidFill>
+                        </a:rPr>
+                        <a:t>NOTA</a:t>
+                      </a:r>
+                    </a:p>
+                  </a:txBody>
+                  <a:tcPr marL="64008" marR="64008" marT="27432" marB="27432">
+                    <a:solidFill>
+                      <a:srgbClr val="F7F3EA"/>
+                    </a:solidFill>
+                  </a:tcPr>
+                </a:tc>
+                <a:tc>
+                  <a:txBody>
+                    <a:bodyPr wrap="square"/>
+                    <a:lstStyle/>
+                    <a:p>
+                      <a:r>
+                        <a:rPr sz="1100">
+                          <a:solidFill>
+                            <a:srgbClr val="1E293B"/>
+                          </a:solidFill>
+                        </a:rPr>
+                        <a:t>Biblias: las 2 de Camila</a:t>
+                      </a:r>
+                    </a:p>
+                  </a:txBody>
+                  <a:tcPr marL="64008" marR="64008" marT="27432" marB="27432">
+                    <a:solidFill>
+                      <a:srgbClr val="F7F3EA"/>
+                    </a:solidFill>
+                  </a:tcPr>
+                </a:tc>
+                <a:tc>
+                  <a:txBody>
+                    <a:bodyPr wrap="square"/>
+                    <a:lstStyle/>
+                    <a:p>
+                      <a:r>
+                        <a:rPr sz="1100">
+                          <a:solidFill>
+                            <a:srgbClr val="1E293B"/>
+                          </a:solidFill>
+                        </a:rPr>
+                        <a:t>Confirmar con Camila y con Juan Manuel: si ella puso 1,360 de su bolsillo, o se le reembolsa, o se registra como donación en especie (el costo del retiro subiría a 618,429 y la especie a 93,765). La caja y el cuadre con el banco no cambian en ningún caso.</a:t>
+                      </a:r>
+                    </a:p>
+                  </a:txBody>
+                  <a:tcPr marL="64008" marR="64008" marT="27432" marB="27432">
+                    <a:solidFill>
+                      <a:srgbClr val="F7F3EA"/>
                     </a:solidFill>
                   </a:tcPr>
                 </a:tc>
@@ -5178,7 +5243,7 @@
                             <a:srgbClr val="1E293B"/>
                           </a:solidFill>
                         </a:rPr>
-                        <a:t>36 verificaciones recalculadas al generar el archivo</a:t>
+                        <a:t>37 verificaciones recalculadas al generar el archivo</a:t>
                       </a:r>
                     </a:p>
                   </a:txBody>
@@ -6093,7 +6158,7 @@
                   <a:srgbClr val="1E293B"/>
                 </a:solidFill>
               </a:rPr>
-              <a:t>36 verificaciones se recalculan cada vez que se genera el archivo; 36 pasan y la restante es un dato pendiente, no un error de suma.</a:t>
+              <a:t>37 verificaciones se recalculan cada vez que se genera el archivo; 37 pasan y la restante es un dato pendiente, no un error de suma.</a:t>
             </a:r>
           </a:p>
           <a:p>

--- a/data/presupuesto/Conciliacion_ETC88_Presentacion.pptx
+++ b/data/presupuesto/Conciliacion_ETC88_Presentacion.pptx
@@ -3888,7 +3888,7 @@
                   <a:srgbClr val="888888"/>
                 </a:solidFill>
               </a:rPr>
-              <a:t>0 abiertos · 2 notas · el detalle completo está en la hoja 5 del Excel</a:t>
+              <a:t>0 abiertos · 3 notas · el detalle completo está en la hoja 5 del Excel</a:t>
             </a:r>
           </a:p>
         </p:txBody>
@@ -3937,7 +3937,7 @@
         </p:nvGraphicFramePr>
         <p:xfrm>
           <a:off x="457200" y="1554480"/>
-          <a:ext cx="11247120" cy="1371600"/>
+          <a:ext cx="11247120" cy="1828800"/>
         </p:xfrm>
         <a:graphic>
           <a:graphicData uri="http://schemas.openxmlformats.org/drawingml/2006/table">
@@ -4141,6 +4141,71 @@
                   <a:tcPr marL="64008" marR="64008" marT="27432" marB="27432">
                     <a:solidFill>
                       <a:srgbClr val="F7F3EA"/>
+                    </a:solidFill>
+                  </a:tcPr>
+                </a:tc>
+              </a:tr>
+              <a:tr h="457200">
+                <a:tc>
+                  <a:txBody>
+                    <a:bodyPr wrap="square"/>
+                    <a:lstStyle/>
+                    <a:p>
+                      <a:r>
+                        <a:rPr sz="1100">
+                          <a:solidFill>
+                            <a:srgbClr val="1E293B"/>
+                          </a:solidFill>
+                        </a:rPr>
+                        <a:t>NOTA</a:t>
+                      </a:r>
+                    </a:p>
+                  </a:txBody>
+                  <a:tcPr marL="64008" marR="64008" marT="27432" marB="27432">
+                    <a:solidFill>
+                      <a:srgbClr val="FFFFFF"/>
+                    </a:solidFill>
+                  </a:tcPr>
+                </a:tc>
+                <a:tc>
+                  <a:txBody>
+                    <a:bodyPr wrap="square"/>
+                    <a:lstStyle/>
+                    <a:p>
+                      <a:r>
+                        <a:rPr sz="1100">
+                          <a:solidFill>
+                            <a:srgbClr val="1E293B"/>
+                          </a:solidFill>
+                        </a:rPr>
+                        <a:t>Habitaciones de pequeños grupos: 400 sin explicar</a:t>
+                      </a:r>
+                    </a:p>
+                  </a:txBody>
+                  <a:tcPr marL="64008" marR="64008" marT="27432" marB="27432">
+                    <a:solidFill>
+                      <a:srgbClr val="FFFFFF"/>
+                    </a:solidFill>
+                  </a:tcPr>
+                </a:tc>
+                <a:tc>
+                  <a:txBody>
+                    <a:bodyPr wrap="square"/>
+                    <a:lstStyle/>
+                    <a:p>
+                      <a:r>
+                        <a:rPr sz="1100">
+                          <a:solidFill>
+                            <a:srgbClr val="1E293B"/>
+                          </a:solidFill>
+                        </a:rPr>
+                        <a:t>Una línea de la factura de la casa lo cierra. No afecta ningún total: lo pagado es lo pagado.</a:t>
+                      </a:r>
+                    </a:p>
+                  </a:txBody>
+                  <a:tcPr marL="64008" marR="64008" marT="27432" marB="27432">
+                    <a:solidFill>
+                      <a:srgbClr val="FFFFFF"/>
                     </a:solidFill>
                   </a:tcPr>
                 </a:tc>
